--- a/lecons/F5/44_F5_M3_L38_Population_and_Resource_Model_Malthus.pptx
+++ b/lecons/F5/44_F5_M3_L38_Population_and_Resource_Model_Malthus.pptx
@@ -12935,7 +12935,7 @@
               <a:buNone/>
             </a:pPr>
             <a:r>
-              <a:rPr lang="en-US" sz="4000" b="1" dirty="0">
+              <a:rPr lang="en-US" sz="3200" b="1" dirty="0">
                 <a:solidFill>
                   <a:srgbClr val="111111"/>
                 </a:solidFill>
@@ -12945,7 +12945,7 @@
               </a:rPr>
               <a:t>Topic: The Dynamics of Population and Implications</a:t>
             </a:r>
-            <a:endParaRPr lang="en-US" sz="4000" dirty="0"/>
+            <a:endParaRPr lang="en-US" sz="3200" dirty="0"/>
           </a:p>
           <a:p>
             <a:pPr algn="l" indent="0" marL="0">
@@ -12955,7 +12955,7 @@
               <a:buNone/>
             </a:pPr>
             <a:r>
-              <a:rPr lang="en-US" sz="4000" b="1" dirty="0">
+              <a:rPr lang="en-US" sz="3200" b="1" dirty="0">
                 <a:solidFill>
                   <a:srgbClr val="111111"/>
                 </a:solidFill>
@@ -12965,7 +12965,7 @@
               </a:rPr>
               <a:t>Sub-topic: Population and Resources</a:t>
             </a:r>
-            <a:endParaRPr lang="en-US" sz="4000" dirty="0"/>
+            <a:endParaRPr lang="en-US" sz="3200" dirty="0"/>
           </a:p>
           <a:p>
             <a:pPr algn="l" indent="0" marL="0">
@@ -12975,7 +12975,7 @@
               <a:buNone/>
             </a:pPr>
             <a:r>
-              <a:rPr lang="en-US" sz="4000" b="1" dirty="0">
+              <a:rPr lang="en-US" sz="3200" b="1" dirty="0">
                 <a:solidFill>
                   <a:srgbClr val="990011"/>
                 </a:solidFill>
@@ -12985,7 +12985,7 @@
               </a:rPr>
               <a:t>Lesson 38: Population and Resource Model (Malthus)</a:t>
             </a:r>
-            <a:endParaRPr lang="en-US" sz="4000" dirty="0"/>
+            <a:endParaRPr lang="en-US" sz="3200" dirty="0"/>
           </a:p>
         </p:txBody>
       </p:sp>

--- a/lecons/F5/44_F5_M3_L38_Population_and_Resource_Model_Malthus.pptx
+++ b/lecons/F5/44_F5_M3_L38_Population_and_Resource_Model_Malthus.pptx
@@ -3191,7 +3191,7 @@
           <a:p>
             <a:r>
               <a:rPr lang="en-US" dirty="0"/>
-              <a:t>Let us copy Conclusions and Criticisms. Malthus concluded and was criticised as follows. On this slide we have Positive checks and Preventive checks. Write each point on a new line, with the key term first, and explain it in your own words when we revise. When you finish, we go to the next slide.</a:t>
+              <a:t>Let us copy Conclusions. Malthus concluded that population is limited by the following checks. On this slide we have Positive checks and Preventive checks. Write each point on a new line, with the key term first, and explain it in your own words when we revise.</a:t>
             </a:r>
             <a:endParaRPr lang="en-US" dirty="0"/>
           </a:p>
@@ -3279,7 +3279,7 @@
           <a:p>
             <a:r>
               <a:rPr lang="en-US" dirty="0"/>
-              <a:t>We continue with Conclusions and Criticisms. On this slide we have Criticisms and Relevance. Write each point on a new line, with the key term first, and explain it in your own words when we revise.</a:t>
+              <a:t>Let us copy Criticisms and Relevance. The theory of Malthus is judged as follows. On this slide we have Technology, Trade and Relevance. Write each point on a new line, with the key term first, and explain it in your own words when we revise.</a:t>
             </a:r>
             <a:endParaRPr lang="en-US" dirty="0"/>
           </a:p>
@@ -13861,7 +13861,7 @@
         <p:spPr>
           <a:xfrm>
             <a:off x="0" y="658368"/>
-            <a:ext cx="3840480" cy="5833872"/>
+            <a:ext cx="2468880" cy="5833872"/>
           </a:xfrm>
           <a:prstGeom prst="rect">
             <a:avLst/>
@@ -13876,8 +13876,8 @@
         </p:nvSpPr>
         <p:spPr>
           <a:xfrm>
-            <a:off x="4069080" y="1005840"/>
-            <a:ext cx="7802575" cy="731520"/>
+            <a:off x="2697480" y="1005840"/>
+            <a:ext cx="9174175" cy="731520"/>
           </a:xfrm>
           <a:prstGeom prst="rect">
             <a:avLst/>
@@ -13917,8 +13917,47 @@
         </p:nvSpPr>
         <p:spPr>
           <a:xfrm>
-            <a:off x="4069080" y="1783080"/>
-            <a:ext cx="7802575" cy="4663440"/>
+            <a:off x="2697480" y="1737360"/>
+            <a:ext cx="9174175" cy="457200"/>
+          </a:xfrm>
+          <a:prstGeom prst="rect">
+            <a:avLst/>
+          </a:prstGeom>
+          <a:noFill/>
+          <a:ln/>
+        </p:spPr>
+        <p:txBody>
+          <a:bodyPr wrap="square" lIns="0" tIns="0" rIns="0" bIns="0" rtlCol="0" anchor="ctr"/>
+          <a:lstStyle/>
+          <a:p>
+            <a:pPr algn="l" indent="0" marL="0">
+              <a:buNone/>
+            </a:pPr>
+            <a:r>
+              <a:rPr lang="en-US" sz="3200" b="1" dirty="0">
+                <a:solidFill>
+                  <a:srgbClr val="990011"/>
+                </a:solidFill>
+                <a:latin typeface="Times New Roman" pitchFamily="34" charset="0"/>
+                <a:ea typeface="Times New Roman" pitchFamily="34" charset="-122"/>
+                <a:cs typeface="Times New Roman" pitchFamily="34" charset="-120"/>
+              </a:rPr>
+              <a:t>A) Conclusions</a:t>
+            </a:r>
+            <a:endParaRPr lang="en-US" sz="3200" dirty="0"/>
+          </a:p>
+        </p:txBody>
+      </p:sp>
+      <p:sp>
+        <p:nvSpPr>
+          <p:cNvPr id="6" name="Text 3"/>
+          <p:cNvSpPr/>
+          <p:nvPr/>
+        </p:nvSpPr>
+        <p:spPr>
+          <a:xfrm>
+            <a:off x="2697480" y="2240280"/>
+            <a:ext cx="9174175" cy="4206240"/>
           </a:xfrm>
           <a:prstGeom prst="rect">
             <a:avLst/>
@@ -13945,7 +13984,7 @@
                 <a:ea typeface="Times New Roman" pitchFamily="34" charset="-122"/>
                 <a:cs typeface="Times New Roman" pitchFamily="34" charset="-120"/>
               </a:rPr>
-              <a:t>Malthus concluded and was criticised as follows:</a:t>
+              <a:t>Malthus concluded that population is limited by the following checks:</a:t>
             </a:r>
             <a:endParaRPr lang="en-US" sz="4000" dirty="0"/>
           </a:p>
@@ -14154,7 +14193,7 @@
         <p:spPr>
           <a:xfrm>
             <a:off x="0" y="658368"/>
-            <a:ext cx="5120640" cy="5833872"/>
+            <a:ext cx="1463040" cy="5833872"/>
           </a:xfrm>
           <a:prstGeom prst="rect">
             <a:avLst/>
@@ -14169,8 +14208,8 @@
         </p:nvSpPr>
         <p:spPr>
           <a:xfrm>
-            <a:off x="5349240" y="1005840"/>
-            <a:ext cx="6522415" cy="731520"/>
+            <a:off x="1691640" y="1005840"/>
+            <a:ext cx="10180015" cy="731520"/>
           </a:xfrm>
           <a:prstGeom prst="rect">
             <a:avLst/>
@@ -14196,7 +14235,7 @@
                 <a:ea typeface="Times New Roman" pitchFamily="34" charset="-122"/>
                 <a:cs typeface="Times New Roman" pitchFamily="34" charset="-120"/>
               </a:rPr>
-              <a:t>2. Conclusions and Criticisms (continued)</a:t>
+              <a:t>2. Conclusions and Criticisms</a:t>
             </a:r>
             <a:endParaRPr lang="en-US" sz="3600" dirty="0"/>
           </a:p>
@@ -14210,8 +14249,47 @@
         </p:nvSpPr>
         <p:spPr>
           <a:xfrm>
-            <a:off x="5349240" y="1783080"/>
-            <a:ext cx="6522415" cy="4663440"/>
+            <a:off x="1691640" y="1737360"/>
+            <a:ext cx="10180015" cy="457200"/>
+          </a:xfrm>
+          <a:prstGeom prst="rect">
+            <a:avLst/>
+          </a:prstGeom>
+          <a:noFill/>
+          <a:ln/>
+        </p:spPr>
+        <p:txBody>
+          <a:bodyPr wrap="square" lIns="0" tIns="0" rIns="0" bIns="0" rtlCol="0" anchor="ctr"/>
+          <a:lstStyle/>
+          <a:p>
+            <a:pPr algn="l" indent="0" marL="0">
+              <a:buNone/>
+            </a:pPr>
+            <a:r>
+              <a:rPr lang="en-US" sz="3200" b="1" dirty="0">
+                <a:solidFill>
+                  <a:srgbClr val="990011"/>
+                </a:solidFill>
+                <a:latin typeface="Times New Roman" pitchFamily="34" charset="0"/>
+                <a:ea typeface="Times New Roman" pitchFamily="34" charset="-122"/>
+                <a:cs typeface="Times New Roman" pitchFamily="34" charset="-120"/>
+              </a:rPr>
+              <a:t>B) Criticisms and Relevance</a:t>
+            </a:r>
+            <a:endParaRPr lang="en-US" sz="3200" dirty="0"/>
+          </a:p>
+        </p:txBody>
+      </p:sp>
+      <p:sp>
+        <p:nvSpPr>
+          <p:cNvPr id="6" name="Text 3"/>
+          <p:cNvSpPr/>
+          <p:nvPr/>
+        </p:nvSpPr>
+        <p:spPr>
+          <a:xfrm>
+            <a:off x="1691640" y="2240280"/>
+            <a:ext cx="10180015" cy="4206240"/>
           </a:xfrm>
           <a:prstGeom prst="rect">
             <a:avLst/>
@@ -14230,7 +14308,7 @@
               <a:buNone/>
             </a:pPr>
             <a:r>
-              <a:rPr lang="en-US" sz="4000" b="1" dirty="0">
+              <a:rPr lang="en-US" sz="4000" i="1" dirty="0">
                 <a:solidFill>
                   <a:srgbClr val="111111"/>
                 </a:solidFill>
@@ -14238,8 +14316,11 @@
                 <a:ea typeface="Times New Roman" pitchFamily="34" charset="-122"/>
                 <a:cs typeface="Times New Roman" pitchFamily="34" charset="-120"/>
               </a:rPr>
-              <a:t>Criticisms: </a:t>
-            </a:r>
+              <a:t>The theory of Malthus is judged as follows:</a:t>
+            </a:r>
+            <a:endParaRPr lang="en-US" sz="4000" dirty="0"/>
+          </a:p>
+          <a:p>
             <a:pPr algn="l" indent="0" marL="0">
               <a:spcAft>
                 <a:spcPts val="800"/>
@@ -14247,7 +14328,7 @@
               <a:buNone/>
             </a:pPr>
             <a:r>
-              <a:rPr lang="en-US" sz="4000" dirty="0">
+              <a:rPr lang="en-US" sz="4000" b="1" dirty="0">
                 <a:solidFill>
                   <a:srgbClr val="111111"/>
                 </a:solidFill>
@@ -14255,7 +14336,61 @@
                 <a:ea typeface="Times New Roman" pitchFamily="34" charset="-122"/>
                 <a:cs typeface="Times New Roman" pitchFamily="34" charset="-120"/>
               </a:rPr>
-              <a:t>Technology increased food production, and trade supplies food.</a:t>
+              <a:t>Technology: </a:t>
+            </a:r>
+            <a:pPr algn="l" indent="0" marL="0">
+              <a:spcAft>
+                <a:spcPts val="800"/>
+              </a:spcAft>
+              <a:buNone/>
+            </a:pPr>
+            <a:r>
+              <a:rPr lang="en-US" sz="4000" dirty="0">
+                <a:solidFill>
+                  <a:srgbClr val="111111"/>
+                </a:solidFill>
+                <a:latin typeface="Times New Roman" pitchFamily="34" charset="0"/>
+                <a:ea typeface="Times New Roman" pitchFamily="34" charset="-122"/>
+                <a:cs typeface="Times New Roman" pitchFamily="34" charset="-120"/>
+              </a:rPr>
+              <a:t>New methods increased food production.</a:t>
+            </a:r>
+            <a:endParaRPr lang="en-US" sz="4000" dirty="0"/>
+          </a:p>
+          <a:p>
+            <a:pPr algn="l" indent="0" marL="0">
+              <a:spcAft>
+                <a:spcPts val="800"/>
+              </a:spcAft>
+              <a:buNone/>
+            </a:pPr>
+            <a:r>
+              <a:rPr lang="en-US" sz="4000" b="1" dirty="0">
+                <a:solidFill>
+                  <a:srgbClr val="111111"/>
+                </a:solidFill>
+                <a:latin typeface="Times New Roman" pitchFamily="34" charset="0"/>
+                <a:ea typeface="Times New Roman" pitchFamily="34" charset="-122"/>
+                <a:cs typeface="Times New Roman" pitchFamily="34" charset="-120"/>
+              </a:rPr>
+              <a:t>Trade: </a:t>
+            </a:r>
+            <a:pPr algn="l" indent="0" marL="0">
+              <a:spcAft>
+                <a:spcPts val="800"/>
+              </a:spcAft>
+              <a:buNone/>
+            </a:pPr>
+            <a:r>
+              <a:rPr lang="en-US" sz="4000" dirty="0">
+                <a:solidFill>
+                  <a:srgbClr val="111111"/>
+                </a:solidFill>
+                <a:latin typeface="Times New Roman" pitchFamily="34" charset="0"/>
+                <a:ea typeface="Times New Roman" pitchFamily="34" charset="-122"/>
+                <a:cs typeface="Times New Roman" pitchFamily="34" charset="-120"/>
+              </a:rPr>
+              <a:t>Countries can buy food from abroad.</a:t>
             </a:r>
             <a:endParaRPr lang="en-US" sz="4000" dirty="0"/>
           </a:p>
@@ -18299,7 +18434,7 @@
                           <a:ea typeface="Calibri" pitchFamily="34" charset="-122"/>
                           <a:cs typeface="Calibri" pitchFamily="34" charset="-120"/>
                         </a:rPr>
-                        <a:t>Principles of the Malthus Model; Conclusions and Criticisms.</a:t>
+                        <a:t>Principles of the Malthus Model; Conclusions; Criticisms and Relevance.</a:t>
                       </a:r>
                       <a:endParaRPr lang="en-US" sz="1600" dirty="0">
                         <a:latin typeface="Calibri" charset="0"/>
